--- a/Martes-09/S01_Martes-09_1_Carrusel_Que-es-visar_9x16.pptx
+++ b/Martes-09/S01_Martes-09_1_Carrusel_Que-es-visar_9x16.pptx
@@ -3397,7 +3397,7 @@
           <a:p>
             <a:pPr algn="l">
               <a:lnSpc>
-                <a:spcPct val="110000"/>
+                <a:spcPct val="115000"/>
               </a:lnSpc>
             </a:pPr>
             <a:r>
@@ -3772,7 +3772,7 @@
                 </a:solidFill>
                 <a:latin typeface="Inter"/>
               </a:rPr>
-              <a:t>Pronto, visar será cosa de horas.</a:t>
+              <a:t>En Notaly, visar es cosa de horas.</a:t>
             </a:r>
           </a:p>
         </p:txBody>
@@ -3786,7 +3786,7 @@
         <p:spPr>
           <a:xfrm>
             <a:off x="777240" y="10746994"/>
-            <a:ext cx="6675120" cy="1118108"/>
+            <a:ext cx="6675120" cy="1530858"/>
           </a:xfrm>
           <a:prstGeom prst="rect">
             <a:avLst/>
@@ -3811,7 +3811,7 @@
                 </a:solidFill>
                 <a:latin typeface="Inter"/>
               </a:rPr>
-              <a:t>Síguenos para más derecho fácil.</a:t>
+              <a:t>Míralo en early access: notaly.com.ve</a:t>
             </a:r>
           </a:p>
         </p:txBody>

--- a/Martes-09/S01_Martes-09_1_Carrusel_Que-es-visar_9x16.pptx
+++ b/Martes-09/S01_Martes-09_1_Carrusel_Que-es-visar_9x16.pptx
@@ -3786,7 +3786,7 @@
         <p:spPr>
           <a:xfrm>
             <a:off x="777240" y="10746994"/>
-            <a:ext cx="6675120" cy="1530858"/>
+            <a:ext cx="6675120" cy="1118108"/>
           </a:xfrm>
           <a:prstGeom prst="rect">
             <a:avLst/>
@@ -3811,7 +3811,7 @@
                 </a:solidFill>
                 <a:latin typeface="Inter"/>
               </a:rPr>
-              <a:t>Míralo en early access: notaly.com.ve</a:t>
+              <a:t>Conócenos en notaly.com.ve</a:t>
             </a:r>
           </a:p>
         </p:txBody>
